--- a/public/fun/pack/pptx/birthdaypro/돌잔치프리미엄_21_성장기록중심_스카이펄.pptx
+++ b/public/fun/pack/pptx/birthdaypro/돌잔치프리미엄_21_성장기록중심_스카이펄.pptx
@@ -112,12 +112,12 @@
   <p:extLst>
     <p:ext uri="{521415D9-36F7-43E2-AB2F-B90AF26B5E84}">
       <p14:sectionLst xmlns:p14="http://schemas.microsoft.com/office/powerpoint/2010/main">
-        <p14:section name="시작" id="{33A2E458-DB7E-4479-939A-77D718948CD7}">
+        <p14:section name="시작" id="{CB248CD2-A275-4149-B2E9-A875B3093C3D}">
           <p14:sldIdLst>
             <p14:sldId id="256"/>
           </p14:sldIdLst>
         </p14:section>
-        <p14:section name="본문" id="{3F306777-CE44-457C-BB26-3B8C07DD904C}">
+        <p14:section name="본문" id="{D5FC56C6-516D-46E1-BCBB-72E8CA5677BE}">
           <p14:sldIdLst>
             <p14:sldId id="257"/>
             <p14:sldId id="258"/>
@@ -125,7 +125,7 @@
             <p14:sldId id="260"/>
           </p14:sldIdLst>
         </p14:section>
-        <p14:section name="마무리" id="{500A0CD7-0F21-4BAD-89C2-0273E3550DD4}">
+        <p14:section name="마무리" id="{8BC7E4B7-6C23-4812-A9E6-372269AB3964}">
           <p14:sldIdLst>
             <p14:sldId id="261"/>
           </p14:sldIdLst>
@@ -1545,7 +1545,7 @@
             </a:lvl1pPr>
           </a:lstStyle>
           <a:p>
-            <a:fld id="{95B1488D-72D4-42D8-978E-D13458CEE2B7}" type="slidenum">
+            <a:fld id="{D1C1BD80-5BCD-4979-A565-57F97AB731E4}" type="slidenum">
               <a:rPr lang="en-US"/>
               <a:t>‹#›</a:t>
             </a:fld>
@@ -2189,7 +2189,7 @@
             </a:lvl1pPr>
           </a:lstStyle>
           <a:p>
-            <a:fld id="{236C9FB9-686B-40F8-9CC0-EFAEA3EC24C2}" type="slidenum">
+            <a:fld id="{5B8138AF-4A73-4822-8E2B-D15792C6A330}" type="slidenum">
               <a:rPr lang="en-US"/>
               <a:t>‹#›</a:t>
             </a:fld>
@@ -2877,7 +2877,7 @@
             </a:lvl1pPr>
           </a:lstStyle>
           <a:p>
-            <a:fld id="{4CCBE0B5-2817-4DCC-B2E7-7108C375CF3F}" type="slidenum">
+            <a:fld id="{88C51873-62A1-4C33-B597-8EA13958C5C1}" type="slidenum">
               <a:rPr lang="en-US"/>
               <a:t>‹#›</a:t>
             </a:fld>
@@ -3766,7 +3766,7 @@
           <a:p>
             <a:r>
               <a:rPr lang="ko-KR"/>
-              <a:t>땀 흘리며 보낸 첫 여름을 지났습니다</a:t>
+              <a:t>땀 흘리며 보낸 날도 잘 지났습니다</a:t>
             </a:r>
           </a:p>
         </p:txBody>
@@ -3788,7 +3788,7 @@
           <a:p>
             <a:r>
               <a:rPr lang="ko-KR"/>
-              <a:t>아기 이름 · 0000. 00. 00</a:t>
+              <a:t>아기 이름 · 날짜 입력</a:t>
             </a:r>
           </a:p>
           <a:p>
@@ -3949,7 +3949,7 @@
           <a:bodyPr/>
           <a:lstStyle/>
           <a:p>
-            <a:fld id="{79C1DBC3-BDD3-4837-A10E-CBA267DEF8CC}" type="slidenum">
+            <a:fld id="{E4226DD5-A39A-487D-930F-67B3845269D2}" type="slidenum">
               <a:rPr lang="en-US"/>
               <a:t>‹#›</a:t>
             </a:fld>
@@ -4549,7 +4549,7 @@
           <a:bodyPr/>
           <a:lstStyle/>
           <a:p>
-            <a:fld id="{6B61C82C-F39B-4B21-8D41-980DDE055303}" type="slidenum">
+            <a:fld id="{3919B5AE-8822-407A-898E-CBE51CDDFC98}" type="slidenum">
               <a:rPr lang="en-US"/>
               <a:t>‹#›</a:t>
             </a:fld>
@@ -5730,7 +5730,7 @@
           <a:bodyPr/>
           <a:lstStyle/>
           <a:p>
-            <a:fld id="{A7890FCA-A258-41BE-A4F6-F46E6B95F0B1}" type="slidenum">
+            <a:fld id="{3445EEC7-0C58-4170-9600-AFF8F276D71B}" type="slidenum">
               <a:rPr lang="en-US"/>
               <a:t>‹#›</a:t>
             </a:fld>
@@ -6405,7 +6405,7 @@
           <a:bodyPr/>
           <a:lstStyle/>
           <a:p>
-            <a:fld id="{5FE314BB-06C7-4CF6-8ADE-C07208A32AEE}" type="slidenum">
+            <a:fld id="{1E1B5DEF-9CF4-45B0-919E-73BD0F4F1BC9}" type="slidenum">
               <a:rPr lang="en-US"/>
               <a:t>‹#›</a:t>
             </a:fld>
